--- a/ECE_157B_272B_Homework3_Template.pptx
+++ b/ECE_157B_272B_Homework3_Template.pptx
@@ -226,7 +226,7 @@
           <a:p>
             <a:fld id="{80680FBE-A8DF-4758-9AC4-3A9E1039168F}" type="datetimeFigureOut">
               <a:rPr lang="en-US" smtClean="0"/>
-              <a:t>2/21/2023</a:t>
+              <a:t>2/23/2025</a:t>
             </a:fld>
             <a:endParaRPr lang="en-US" dirty="0"/>
           </a:p>
@@ -391,7 +391,7 @@
           <a:p>
             <a:fld id="{EC13577B-6902-467D-A26C-08A0DD5E4E03}" type="datetimeFigureOut">
               <a:rPr lang="en-US" smtClean="0"/>
-              <a:t>2/21/2023</a:t>
+              <a:t>2/23/2025</a:t>
             </a:fld>
             <a:endParaRPr lang="en-US" dirty="0"/>
           </a:p>
@@ -1186,7 +1186,7 @@
             <a:fld id="{8BEEBAAA-29B5-4AF5-BC5F-7E580C29002D}" type="datetimeFigureOut">
               <a:rPr lang="en-US" smtClean="0"/>
               <a:pPr/>
-              <a:t>2/21/2023</a:t>
+              <a:t>2/23/2025</a:t>
             </a:fld>
             <a:endParaRPr lang="en-US" dirty="0"/>
           </a:p>
@@ -1812,7 +1812,7 @@
             <a:fld id="{8BEEBAAA-29B5-4AF5-BC5F-7E580C29002D}" type="datetimeFigureOut">
               <a:rPr lang="en-US" smtClean="0"/>
               <a:pPr/>
-              <a:t>2/21/2023</a:t>
+              <a:t>2/23/2025</a:t>
             </a:fld>
             <a:endParaRPr lang="en-US" dirty="0"/>
           </a:p>
@@ -2327,14 +2327,20 @@
               <a:buNone/>
             </a:pPr>
             <a:r>
-              <a:rPr lang="en-US" sz="2400" dirty="0">
+              <a:rPr lang="en-US" sz="2400">
                 <a:solidFill>
                   <a:schemeClr val="bg1"/>
                 </a:solidFill>
                 <a:latin typeface="+mj-lt"/>
               </a:rPr>
-              <a:t>YOUR NAME</a:t>
-            </a:r>
+              <a:t>Edward Ding</a:t>
+            </a:r>
+            <a:endParaRPr lang="en-US" sz="2400" dirty="0">
+              <a:solidFill>
+                <a:schemeClr val="bg1"/>
+              </a:solidFill>
+              <a:latin typeface="+mj-lt"/>
+            </a:endParaRPr>
           </a:p>
         </p:txBody>
       </p:sp>
@@ -5820,15 +5826,6 @@
 </file>
 
 <file path=customXml/item1.xml><?xml version="1.0" encoding="utf-8"?>
-<p:properties xmlns:p="http://schemas.microsoft.com/office/2006/metadata/properties" xmlns:xsi="http://www.w3.org/2001/XMLSchema-instance" xmlns:pc="http://schemas.microsoft.com/office/infopath/2007/PartnerControls">
-  <documentManagement>
-    <Status xmlns="71af3243-3dd4-4a8d-8c0d-dd76da1f02a5">Not started</Status>
-    <MediaServiceKeyPoints xmlns="71af3243-3dd4-4a8d-8c0d-dd76da1f02a5" xsi:nil="true"/>
-  </documentManagement>
-</p:properties>
-</file>
-
-<file path=customXml/item2.xml><?xml version="1.0" encoding="utf-8"?>
 <ct:contentTypeSchema xmlns:ct="http://schemas.microsoft.com/office/2006/metadata/contentType" xmlns:ma="http://schemas.microsoft.com/office/2006/metadata/properties/metaAttributes" ct:_="" ma:_="" ma:contentTypeName="Document" ma:contentTypeID="0x01010079F111ED35F8CC479449609E8A0923A6" ma:contentTypeVersion="12" ma:contentTypeDescription="Create a new document." ma:contentTypeScope="" ma:versionID="a8a52e8c320b9a064ae3583ae3861c92">
   <xsd:schema xmlns:xsd="http://www.w3.org/2001/XMLSchema" xmlns:xs="http://www.w3.org/2001/XMLSchema" xmlns:p="http://schemas.microsoft.com/office/2006/metadata/properties" xmlns:ns2="71af3243-3dd4-4a8d-8c0d-dd76da1f02a5" xmlns:ns3="16c05727-aa75-4e4a-9b5f-8a80a1165891" targetNamespace="http://schemas.microsoft.com/office/2006/metadata/properties" ma:root="true" ma:fieldsID="88020cb39231a0945110f9cd888b521a" ns2:_="" ns3:_="">
     <xsd:import namespace="71af3243-3dd4-4a8d-8c0d-dd76da1f02a5"/>
@@ -6049,6 +6046,15 @@
 </ct:contentTypeSchema>
 </file>
 
+<file path=customXml/item2.xml><?xml version="1.0" encoding="utf-8"?>
+<p:properties xmlns:p="http://schemas.microsoft.com/office/2006/metadata/properties" xmlns:xsi="http://www.w3.org/2001/XMLSchema-instance" xmlns:pc="http://schemas.microsoft.com/office/infopath/2007/PartnerControls">
+  <documentManagement>
+    <Status xmlns="71af3243-3dd4-4a8d-8c0d-dd76da1f02a5">Not started</Status>
+    <MediaServiceKeyPoints xmlns="71af3243-3dd4-4a8d-8c0d-dd76da1f02a5" xsi:nil="true"/>
+  </documentManagement>
+</p:properties>
+</file>
+
 <file path=customXml/item3.xml><?xml version="1.0" encoding="utf-8"?>
 <?mso-contentType ?>
 <FormTemplates xmlns="http://schemas.microsoft.com/sharepoint/v3/contenttype/forms">
@@ -6059,23 +6065,6 @@
 </file>
 
 <file path=customXml/itemProps1.xml><?xml version="1.0" encoding="utf-8"?>
-<ds:datastoreItem xmlns:ds="http://schemas.openxmlformats.org/officeDocument/2006/customXml" ds:itemID="{950072C5-DDE0-4258-BA7A-4D4B80DFA632}">
-  <ds:schemaRefs>
-    <ds:schemaRef ds:uri="http://schemas.microsoft.com/office/infopath/2007/PartnerControls"/>
-    <ds:schemaRef ds:uri="http://schemas.microsoft.com/office/2006/documentManagement/types"/>
-    <ds:schemaRef ds:uri="http://purl.org/dc/dcmitype/"/>
-    <ds:schemaRef ds:uri="http://schemas.microsoft.com/office/2006/metadata/properties"/>
-    <ds:schemaRef ds:uri="71af3243-3dd4-4a8d-8c0d-dd76da1f02a5"/>
-    <ds:schemaRef ds:uri="http://www.w3.org/XML/1998/namespace"/>
-    <ds:schemaRef ds:uri="http://purl.org/dc/elements/1.1/"/>
-    <ds:schemaRef ds:uri="http://schemas.openxmlformats.org/package/2006/metadata/core-properties"/>
-    <ds:schemaRef ds:uri="16c05727-aa75-4e4a-9b5f-8a80a1165891"/>
-    <ds:schemaRef ds:uri="http://purl.org/dc/terms/"/>
-  </ds:schemaRefs>
-</ds:datastoreItem>
-</file>
-
-<file path=customXml/itemProps2.xml><?xml version="1.0" encoding="utf-8"?>
 <ds:datastoreItem xmlns:ds="http://schemas.openxmlformats.org/officeDocument/2006/customXml" ds:itemID="{FD7FC771-7DFE-49DA-B577-71181BFBCB2E}">
   <ds:schemaRefs>
     <ds:schemaRef ds:uri="http://schemas.microsoft.com/office/2006/metadata/contentType"/>
@@ -6094,6 +6083,23 @@
 </ds:datastoreItem>
 </file>
 
+<file path=customXml/itemProps2.xml><?xml version="1.0" encoding="utf-8"?>
+<ds:datastoreItem xmlns:ds="http://schemas.openxmlformats.org/officeDocument/2006/customXml" ds:itemID="{950072C5-DDE0-4258-BA7A-4D4B80DFA632}">
+  <ds:schemaRefs>
+    <ds:schemaRef ds:uri="http://schemas.microsoft.com/office/infopath/2007/PartnerControls"/>
+    <ds:schemaRef ds:uri="http://schemas.microsoft.com/office/2006/documentManagement/types"/>
+    <ds:schemaRef ds:uri="http://purl.org/dc/dcmitype/"/>
+    <ds:schemaRef ds:uri="http://schemas.microsoft.com/office/2006/metadata/properties"/>
+    <ds:schemaRef ds:uri="71af3243-3dd4-4a8d-8c0d-dd76da1f02a5"/>
+    <ds:schemaRef ds:uri="http://www.w3.org/XML/1998/namespace"/>
+    <ds:schemaRef ds:uri="http://purl.org/dc/elements/1.1/"/>
+    <ds:schemaRef ds:uri="http://schemas.openxmlformats.org/package/2006/metadata/core-properties"/>
+    <ds:schemaRef ds:uri="16c05727-aa75-4e4a-9b5f-8a80a1165891"/>
+    <ds:schemaRef ds:uri="http://purl.org/dc/terms/"/>
+  </ds:schemaRefs>
+</ds:datastoreItem>
+</file>
+
 <file path=customXml/itemProps3.xml><?xml version="1.0" encoding="utf-8"?>
 <ds:datastoreItem xmlns:ds="http://schemas.openxmlformats.org/officeDocument/2006/customXml" ds:itemID="{7EE8C63A-4744-4DE4-BB49-0FF0B5375C60}">
   <ds:schemaRefs>
